--- a/CalendarioAgo26/presentaciones/15_POO_Encapsulamiento.pptx
+++ b/CalendarioAgo26/presentaciones/15_POO_Encapsulamiento.pptx
@@ -140,7 +140,7 @@
 <file path=ppt/revisionInfo.xml><?xml version="1.0" encoding="utf-8"?>
 <p1510:revInfo xmlns:a="http://schemas.openxmlformats.org/drawingml/2006/main" xmlns:r="http://schemas.openxmlformats.org/officeDocument/2006/relationships" xmlns:p1510="http://schemas.microsoft.com/office/powerpoint/2015/10/main">
   <p1510:revLst>
-    <p1510:client id="{24755AE2-CA08-46EC-8009-A370505BCE56}" v="1" dt="2026-03-01T13:14:55.234"/>
+    <p1510:client id="{82423DDB-7D29-4490-B48F-F8682249A702}" v="1" dt="2026-08-11T16:31:04.380"/>
   </p1510:revLst>
 </p1510:revInfo>
 </file>
@@ -150,130 +150,22 @@
   <pc:docChgLst>
     <pc:chgData name="Lizethe Pérez Fuertes" userId="4ae9ef87-2a7d-42f8-8dfa-0a501a9e2ff4" providerId="ADAL" clId="{FDDD45CB-1330-4033-A842-3D2746AFF7C7}"/>
     <pc:docChg chg="undo custSel addSld delSld modSld">
-      <pc:chgData name="Lizethe Pérez Fuertes" userId="4ae9ef87-2a7d-42f8-8dfa-0a501a9e2ff4" providerId="ADAL" clId="{FDDD45CB-1330-4033-A842-3D2746AFF7C7}" dt="2026-03-01T13:15:08.459" v="195" actId="1076"/>
+      <pc:chgData name="Lizethe Pérez Fuertes" userId="4ae9ef87-2a7d-42f8-8dfa-0a501a9e2ff4" providerId="ADAL" clId="{FDDD45CB-1330-4033-A842-3D2746AFF7C7}" dt="2026-08-11T16:31:04.380" v="196"/>
       <pc:docMkLst>
         <pc:docMk/>
       </pc:docMkLst>
-      <pc:sldChg chg="addSp delSp modSp mod">
-        <pc:chgData name="Lizethe Pérez Fuertes" userId="4ae9ef87-2a7d-42f8-8dfa-0a501a9e2ff4" providerId="ADAL" clId="{FDDD45CB-1330-4033-A842-3D2746AFF7C7}" dt="2026-02-27T20:47:16.248" v="165" actId="1035"/>
+      <pc:sldChg chg="modSp">
+        <pc:chgData name="Lizethe Pérez Fuertes" userId="4ae9ef87-2a7d-42f8-8dfa-0a501a9e2ff4" providerId="ADAL" clId="{FDDD45CB-1330-4033-A842-3D2746AFF7C7}" dt="2026-08-11T16:31:04.380" v="196"/>
         <pc:sldMkLst>
           <pc:docMk/>
-          <pc:sldMk cId="1674379023" sldId="602"/>
-        </pc:sldMkLst>
-        <pc:picChg chg="add del mod">
-          <ac:chgData name="Lizethe Pérez Fuertes" userId="4ae9ef87-2a7d-42f8-8dfa-0a501a9e2ff4" providerId="ADAL" clId="{FDDD45CB-1330-4033-A842-3D2746AFF7C7}" dt="2026-02-27T20:47:16.248" v="165" actId="1035"/>
-          <ac:picMkLst>
-            <pc:docMk/>
-            <pc:sldMk cId="1674379023" sldId="602"/>
-            <ac:picMk id="5" creationId="{FB8BFC6F-E8A3-4523-932A-E0C8FFD40C46}"/>
-          </ac:picMkLst>
-        </pc:picChg>
-      </pc:sldChg>
-      <pc:sldChg chg="addSp delSp modSp add mod">
-        <pc:chgData name="Lizethe Pérez Fuertes" userId="4ae9ef87-2a7d-42f8-8dfa-0a501a9e2ff4" providerId="ADAL" clId="{FDDD45CB-1330-4033-A842-3D2746AFF7C7}" dt="2026-03-01T13:09:45.174" v="175" actId="1076"/>
-        <pc:sldMkLst>
-          <pc:docMk/>
-          <pc:sldMk cId="118615350" sldId="648"/>
+          <pc:sldMk cId="542782376" sldId="293"/>
         </pc:sldMkLst>
         <pc:spChg chg="mod">
-          <ac:chgData name="Lizethe Pérez Fuertes" userId="4ae9ef87-2a7d-42f8-8dfa-0a501a9e2ff4" providerId="ADAL" clId="{FDDD45CB-1330-4033-A842-3D2746AFF7C7}" dt="2026-03-01T13:09:42.789" v="174" actId="1076"/>
+          <ac:chgData name="Lizethe Pérez Fuertes" userId="4ae9ef87-2a7d-42f8-8dfa-0a501a9e2ff4" providerId="ADAL" clId="{FDDD45CB-1330-4033-A842-3D2746AFF7C7}" dt="2026-08-11T16:31:04.380" v="196"/>
           <ac:spMkLst>
             <pc:docMk/>
-            <pc:sldMk cId="118615350" sldId="648"/>
-            <ac:spMk id="3" creationId="{59A1954C-0BF7-91D6-7C5F-2205CBAB48D5}"/>
-          </ac:spMkLst>
-        </pc:spChg>
-        <pc:spChg chg="mod">
-          <ac:chgData name="Lizethe Pérez Fuertes" userId="4ae9ef87-2a7d-42f8-8dfa-0a501a9e2ff4" providerId="ADAL" clId="{FDDD45CB-1330-4033-A842-3D2746AFF7C7}" dt="2026-02-27T20:26:22.874" v="117" actId="1076"/>
-          <ac:spMkLst>
-            <pc:docMk/>
-            <pc:sldMk cId="118615350" sldId="648"/>
-            <ac:spMk id="4" creationId="{8002B5CF-3BA5-7C25-67AE-23E40842CFD5}"/>
-          </ac:spMkLst>
-        </pc:spChg>
-        <pc:picChg chg="add mod">
-          <ac:chgData name="Lizethe Pérez Fuertes" userId="4ae9ef87-2a7d-42f8-8dfa-0a501a9e2ff4" providerId="ADAL" clId="{FDDD45CB-1330-4033-A842-3D2746AFF7C7}" dt="2026-03-01T13:09:45.174" v="175" actId="1076"/>
-          <ac:picMkLst>
-            <pc:docMk/>
-            <pc:sldMk cId="118615350" sldId="648"/>
-            <ac:picMk id="5" creationId="{8D1CA2F1-2096-D714-9F93-38A5237E0AC8}"/>
-          </ac:picMkLst>
-        </pc:picChg>
-      </pc:sldChg>
-      <pc:sldChg chg="addSp delSp modSp add mod">
-        <pc:chgData name="Lizethe Pérez Fuertes" userId="4ae9ef87-2a7d-42f8-8dfa-0a501a9e2ff4" providerId="ADAL" clId="{FDDD45CB-1330-4033-A842-3D2746AFF7C7}" dt="2026-03-01T13:11:13.726" v="184" actId="1076"/>
-        <pc:sldMkLst>
-          <pc:docMk/>
-          <pc:sldMk cId="712346558" sldId="649"/>
-        </pc:sldMkLst>
-        <pc:spChg chg="mod">
-          <ac:chgData name="Lizethe Pérez Fuertes" userId="4ae9ef87-2a7d-42f8-8dfa-0a501a9e2ff4" providerId="ADAL" clId="{FDDD45CB-1330-4033-A842-3D2746AFF7C7}" dt="2026-03-01T13:10:22.879" v="178" actId="1076"/>
-          <ac:spMkLst>
-            <pc:docMk/>
-            <pc:sldMk cId="712346558" sldId="649"/>
-            <ac:spMk id="3" creationId="{18BA93F3-3CAF-D4BE-8698-F39F2D6F93B8}"/>
-          </ac:spMkLst>
-        </pc:spChg>
-        <pc:spChg chg="mod">
-          <ac:chgData name="Lizethe Pérez Fuertes" userId="4ae9ef87-2a7d-42f8-8dfa-0a501a9e2ff4" providerId="ADAL" clId="{FDDD45CB-1330-4033-A842-3D2746AFF7C7}" dt="2026-03-01T13:10:25.709" v="179" actId="1076"/>
-          <ac:spMkLst>
-            <pc:docMk/>
-            <pc:sldMk cId="712346558" sldId="649"/>
-            <ac:spMk id="4" creationId="{52600C6A-A4CE-782C-1E7B-1F867FBDC852}"/>
-          </ac:spMkLst>
-        </pc:spChg>
-        <pc:picChg chg="add del mod">
-          <ac:chgData name="Lizethe Pérez Fuertes" userId="4ae9ef87-2a7d-42f8-8dfa-0a501a9e2ff4" providerId="ADAL" clId="{FDDD45CB-1330-4033-A842-3D2746AFF7C7}" dt="2026-03-01T13:11:06.493" v="180" actId="478"/>
-          <ac:picMkLst>
-            <pc:docMk/>
-            <pc:sldMk cId="712346558" sldId="649"/>
-            <ac:picMk id="2" creationId="{0FD3A249-5856-4461-9BEB-468324A84341}"/>
-          </ac:picMkLst>
-        </pc:picChg>
-        <pc:picChg chg="add mod">
-          <ac:chgData name="Lizethe Pérez Fuertes" userId="4ae9ef87-2a7d-42f8-8dfa-0a501a9e2ff4" providerId="ADAL" clId="{FDDD45CB-1330-4033-A842-3D2746AFF7C7}" dt="2026-03-01T13:11:13.726" v="184" actId="1076"/>
-          <ac:picMkLst>
-            <pc:docMk/>
-            <pc:sldMk cId="712346558" sldId="649"/>
-            <ac:picMk id="6" creationId="{9D373540-466E-D9F9-F3FA-1460FE691F98}"/>
-          </ac:picMkLst>
-        </pc:picChg>
-      </pc:sldChg>
-      <pc:sldChg chg="modSp add del mod">
-        <pc:chgData name="Lizethe Pérez Fuertes" userId="4ae9ef87-2a7d-42f8-8dfa-0a501a9e2ff4" providerId="ADAL" clId="{FDDD45CB-1330-4033-A842-3D2746AFF7C7}" dt="2026-03-01T13:14:48.002" v="193" actId="2696"/>
-        <pc:sldMkLst>
-          <pc:docMk/>
-          <pc:sldMk cId="2347398049" sldId="650"/>
-        </pc:sldMkLst>
-        <pc:spChg chg="mod">
-          <ac:chgData name="Lizethe Pérez Fuertes" userId="4ae9ef87-2a7d-42f8-8dfa-0a501a9e2ff4" providerId="ADAL" clId="{FDDD45CB-1330-4033-A842-3D2746AFF7C7}" dt="2026-03-01T13:13:36.461" v="191" actId="123"/>
-          <ac:spMkLst>
-            <pc:docMk/>
-            <pc:sldMk cId="2347398049" sldId="650"/>
-            <ac:spMk id="3" creationId="{2BD8B9D4-F869-089C-B7A4-FD7DAF5A7711}"/>
-          </ac:spMkLst>
-        </pc:spChg>
-        <pc:spChg chg="mod">
-          <ac:chgData name="Lizethe Pérez Fuertes" userId="4ae9ef87-2a7d-42f8-8dfa-0a501a9e2ff4" providerId="ADAL" clId="{FDDD45CB-1330-4033-A842-3D2746AFF7C7}" dt="2026-03-01T13:14:31.030" v="192" actId="1076"/>
-          <ac:spMkLst>
-            <pc:docMk/>
-            <pc:sldMk cId="2347398049" sldId="650"/>
-            <ac:spMk id="4" creationId="{DBE63BE9-3012-EA71-30D0-9910634A8C1E}"/>
-          </ac:spMkLst>
-        </pc:spChg>
-      </pc:sldChg>
-      <pc:sldChg chg="modSp add mod">
-        <pc:chgData name="Lizethe Pérez Fuertes" userId="4ae9ef87-2a7d-42f8-8dfa-0a501a9e2ff4" providerId="ADAL" clId="{FDDD45CB-1330-4033-A842-3D2746AFF7C7}" dt="2026-03-01T13:15:08.459" v="195" actId="1076"/>
-        <pc:sldMkLst>
-          <pc:docMk/>
-          <pc:sldMk cId="2485710823" sldId="650"/>
-        </pc:sldMkLst>
-        <pc:spChg chg="mod">
-          <ac:chgData name="Lizethe Pérez Fuertes" userId="4ae9ef87-2a7d-42f8-8dfa-0a501a9e2ff4" providerId="ADAL" clId="{FDDD45CB-1330-4033-A842-3D2746AFF7C7}" dt="2026-03-01T13:15:08.459" v="195" actId="1076"/>
-          <ac:spMkLst>
-            <pc:docMk/>
-            <pc:sldMk cId="2485710823" sldId="650"/>
-            <ac:spMk id="3" creationId="{2BD8B9D4-F869-089C-B7A4-FD7DAF5A7711}"/>
+            <pc:sldMk cId="542782376" sldId="293"/>
+            <ac:spMk id="2" creationId="{00000000-0000-0000-0000-000000000000}"/>
           </ac:spMkLst>
         </pc:spChg>
       </pc:sldChg>
@@ -364,7 +256,7 @@
           <a:p>
             <a:fld id="{DDE721D5-655F-45D2-B717-3C4CD78C8568}" type="datetimeFigureOut">
               <a:rPr lang="es-MX" smtClean="0"/>
-              <a:t>01/03/2026</a:t>
+              <a:t>11/08/2026</a:t>
             </a:fld>
             <a:endParaRPr lang="es-MX" dirty="0"/>
           </a:p>
@@ -813,7 +705,7 @@
           <a:p>
             <a:fld id="{B3F3E716-CACC-4490-AD07-F24B6A68DE47}" type="datetimeFigureOut">
               <a:rPr lang="es-MX" smtClean="0"/>
-              <a:t>01/03/2026</a:t>
+              <a:t>11/08/2026</a:t>
             </a:fld>
             <a:endParaRPr lang="es-MX" dirty="0"/>
           </a:p>
@@ -983,7 +875,7 @@
           <a:p>
             <a:fld id="{B3F3E716-CACC-4490-AD07-F24B6A68DE47}" type="datetimeFigureOut">
               <a:rPr lang="es-MX" smtClean="0"/>
-              <a:t>01/03/2026</a:t>
+              <a:t>11/08/2026</a:t>
             </a:fld>
             <a:endParaRPr lang="es-MX" dirty="0"/>
           </a:p>
@@ -1163,7 +1055,7 @@
           <a:p>
             <a:fld id="{B3F3E716-CACC-4490-AD07-F24B6A68DE47}" type="datetimeFigureOut">
               <a:rPr lang="es-MX" smtClean="0"/>
-              <a:t>01/03/2026</a:t>
+              <a:t>11/08/2026</a:t>
             </a:fld>
             <a:endParaRPr lang="es-MX" dirty="0"/>
           </a:p>
@@ -1316,7 +1208,7 @@
           <a:p>
             <a:fld id="{1D8BD707-D9CF-40AE-B4C6-C98DA3205C09}" type="datetimeFigureOut">
               <a:rPr lang="en-US" smtClean="0"/>
-              <a:t>3/1/2026</a:t>
+              <a:t>8/11/2026</a:t>
             </a:fld>
             <a:endParaRPr lang="en-US" dirty="0"/>
           </a:p>
@@ -1773,7 +1665,7 @@
           <a:p>
             <a:fld id="{B3F3E716-CACC-4490-AD07-F24B6A68DE47}" type="datetimeFigureOut">
               <a:rPr lang="es-MX" smtClean="0"/>
-              <a:t>01/03/2026</a:t>
+              <a:t>11/08/2026</a:t>
             </a:fld>
             <a:endParaRPr lang="es-MX" dirty="0"/>
           </a:p>
@@ -2019,7 +1911,7 @@
           <a:p>
             <a:fld id="{B3F3E716-CACC-4490-AD07-F24B6A68DE47}" type="datetimeFigureOut">
               <a:rPr lang="es-MX" smtClean="0"/>
-              <a:t>01/03/2026</a:t>
+              <a:t>11/08/2026</a:t>
             </a:fld>
             <a:endParaRPr lang="es-MX" dirty="0"/>
           </a:p>
@@ -2307,7 +2199,7 @@
           <a:p>
             <a:fld id="{B3F3E716-CACC-4490-AD07-F24B6A68DE47}" type="datetimeFigureOut">
               <a:rPr lang="es-MX" smtClean="0"/>
-              <a:t>01/03/2026</a:t>
+              <a:t>11/08/2026</a:t>
             </a:fld>
             <a:endParaRPr lang="es-MX" dirty="0"/>
           </a:p>
@@ -2729,7 +2621,7 @@
           <a:p>
             <a:fld id="{B3F3E716-CACC-4490-AD07-F24B6A68DE47}" type="datetimeFigureOut">
               <a:rPr lang="es-MX" smtClean="0"/>
-              <a:t>01/03/2026</a:t>
+              <a:t>11/08/2026</a:t>
             </a:fld>
             <a:endParaRPr lang="es-MX" dirty="0"/>
           </a:p>
@@ -2847,7 +2739,7 @@
           <a:p>
             <a:fld id="{B3F3E716-CACC-4490-AD07-F24B6A68DE47}" type="datetimeFigureOut">
               <a:rPr lang="es-MX" smtClean="0"/>
-              <a:t>01/03/2026</a:t>
+              <a:t>11/08/2026</a:t>
             </a:fld>
             <a:endParaRPr lang="es-MX" dirty="0"/>
           </a:p>
@@ -2942,7 +2834,7 @@
           <a:p>
             <a:fld id="{B3F3E716-CACC-4490-AD07-F24B6A68DE47}" type="datetimeFigureOut">
               <a:rPr lang="es-MX" smtClean="0"/>
-              <a:t>01/03/2026</a:t>
+              <a:t>11/08/2026</a:t>
             </a:fld>
             <a:endParaRPr lang="es-MX" dirty="0"/>
           </a:p>
@@ -3219,7 +3111,7 @@
           <a:p>
             <a:fld id="{B3F3E716-CACC-4490-AD07-F24B6A68DE47}" type="datetimeFigureOut">
               <a:rPr lang="es-MX" smtClean="0"/>
-              <a:t>01/03/2026</a:t>
+              <a:t>11/08/2026</a:t>
             </a:fld>
             <a:endParaRPr lang="es-MX" dirty="0"/>
           </a:p>
@@ -3472,7 +3364,7 @@
           <a:p>
             <a:fld id="{B3F3E716-CACC-4490-AD07-F24B6A68DE47}" type="datetimeFigureOut">
               <a:rPr lang="es-MX" smtClean="0"/>
-              <a:t>01/03/2026</a:t>
+              <a:t>11/08/2026</a:t>
             </a:fld>
             <a:endParaRPr lang="es-MX" dirty="0"/>
           </a:p>
@@ -3685,7 +3577,7 @@
           <a:p>
             <a:fld id="{B3F3E716-CACC-4490-AD07-F24B6A68DE47}" type="datetimeFigureOut">
               <a:rPr lang="es-MX" smtClean="0"/>
-              <a:t>01/03/2026</a:t>
+              <a:t>11/08/2026</a:t>
             </a:fld>
             <a:endParaRPr lang="es-MX" dirty="0"/>
           </a:p>
@@ -4084,21 +3976,18 @@
           </a:bodyPr>
           <a:lstStyle/>
           <a:p>
-            <a:pPr algn="l" eaLnBrk="1" fontAlgn="auto" hangingPunct="1">
-              <a:spcAft>
-                <a:spcPts val="0"/>
-              </a:spcAft>
+            <a:pPr algn="l">
               <a:defRPr/>
             </a:pPr>
             <a:r>
-              <a:rPr lang="es-MX" sz="3200" dirty="0">
+              <a:rPr lang="es-MX" sz="3200">
                 <a:solidFill>
                   <a:schemeClr val="bg2">
                     <a:lumMod val="50000"/>
                   </a:schemeClr>
                 </a:solidFill>
               </a:rPr>
-              <a:t>TI 3001 C</a:t>
+              <a:t>TI 3008 C</a:t>
             </a:r>
             <a:br>
               <a:rPr lang="es-MX" sz="3200" dirty="0">

--- a/CalendarioAgo26/presentaciones/15_POO_Encapsulamiento.pptx
+++ b/CalendarioAgo26/presentaciones/15_POO_Encapsulamiento.pptx
@@ -140,7 +140,7 @@
 <file path=ppt/revisionInfo.xml><?xml version="1.0" encoding="utf-8"?>
 <p1510:revInfo xmlns:a="http://schemas.openxmlformats.org/drawingml/2006/main" xmlns:r="http://schemas.openxmlformats.org/officeDocument/2006/relationships" xmlns:p1510="http://schemas.microsoft.com/office/powerpoint/2015/10/main">
   <p1510:revLst>
-    <p1510:client id="{82423DDB-7D29-4490-B48F-F8682249A702}" v="1" dt="2026-08-11T16:31:04.380"/>
+    <p1510:client id="{EFB7CB99-A9C5-4804-9ED1-57B441F8353C}" v="1" dt="2026-09-03T16:27:55.849"/>
   </p1510:revLst>
 </p1510:revInfo>
 </file>
@@ -150,7 +150,7 @@
   <pc:docChgLst>
     <pc:chgData name="Lizethe Pérez Fuertes" userId="4ae9ef87-2a7d-42f8-8dfa-0a501a9e2ff4" providerId="ADAL" clId="{FDDD45CB-1330-4033-A842-3D2746AFF7C7}"/>
     <pc:docChg chg="undo custSel addSld delSld modSld">
-      <pc:chgData name="Lizethe Pérez Fuertes" userId="4ae9ef87-2a7d-42f8-8dfa-0a501a9e2ff4" providerId="ADAL" clId="{FDDD45CB-1330-4033-A842-3D2746AFF7C7}" dt="2026-08-11T16:31:04.380" v="196"/>
+      <pc:chgData name="Lizethe Pérez Fuertes" userId="4ae9ef87-2a7d-42f8-8dfa-0a501a9e2ff4" providerId="ADAL" clId="{FDDD45CB-1330-4033-A842-3D2746AFF7C7}" dt="2026-09-03T16:28:15.263" v="326" actId="6549"/>
       <pc:docMkLst>
         <pc:docMk/>
       </pc:docMkLst>
@@ -166,6 +166,166 @@
             <pc:docMk/>
             <pc:sldMk cId="542782376" sldId="293"/>
             <ac:spMk id="2" creationId="{00000000-0000-0000-0000-000000000000}"/>
+          </ac:spMkLst>
+        </pc:spChg>
+      </pc:sldChg>
+      <pc:sldChg chg="modSp">
+        <pc:chgData name="Lizethe Pérez Fuertes" userId="4ae9ef87-2a7d-42f8-8dfa-0a501a9e2ff4" providerId="ADAL" clId="{FDDD45CB-1330-4033-A842-3D2746AFF7C7}" dt="2026-09-03T16:27:55.849" v="318"/>
+        <pc:sldMkLst>
+          <pc:docMk/>
+          <pc:sldMk cId="2179863281" sldId="600"/>
+        </pc:sldMkLst>
+        <pc:spChg chg="mod">
+          <ac:chgData name="Lizethe Pérez Fuertes" userId="4ae9ef87-2a7d-42f8-8dfa-0a501a9e2ff4" providerId="ADAL" clId="{FDDD45CB-1330-4033-A842-3D2746AFF7C7}" dt="2026-09-03T16:27:55.849" v="318"/>
+          <ac:spMkLst>
+            <pc:docMk/>
+            <pc:sldMk cId="2179863281" sldId="600"/>
+            <ac:spMk id="4" creationId="{7CE40F4F-E91D-42FD-B661-EAA8BC18ABC8}"/>
+          </ac:spMkLst>
+        </pc:spChg>
+      </pc:sldChg>
+      <pc:sldChg chg="modSp mod">
+        <pc:chgData name="Lizethe Pérez Fuertes" userId="4ae9ef87-2a7d-42f8-8dfa-0a501a9e2ff4" providerId="ADAL" clId="{FDDD45CB-1330-4033-A842-3D2746AFF7C7}" dt="2026-09-03T16:28:15.263" v="326" actId="6549"/>
+        <pc:sldMkLst>
+          <pc:docMk/>
+          <pc:sldMk cId="1674379023" sldId="602"/>
+        </pc:sldMkLst>
+        <pc:spChg chg="mod">
+          <ac:chgData name="Lizethe Pérez Fuertes" userId="4ae9ef87-2a7d-42f8-8dfa-0a501a9e2ff4" providerId="ADAL" clId="{FDDD45CB-1330-4033-A842-3D2746AFF7C7}" dt="2026-09-03T16:27:05.357" v="307" actId="6549"/>
+          <ac:spMkLst>
+            <pc:docMk/>
+            <pc:sldMk cId="1674379023" sldId="602"/>
+            <ac:spMk id="4" creationId="{7CE40F4F-E91D-42FD-B661-EAA8BC18ABC8}"/>
+          </ac:spMkLst>
+        </pc:spChg>
+        <pc:spChg chg="mod">
+          <ac:chgData name="Lizethe Pérez Fuertes" userId="4ae9ef87-2a7d-42f8-8dfa-0a501a9e2ff4" providerId="ADAL" clId="{FDDD45CB-1330-4033-A842-3D2746AFF7C7}" dt="2026-09-03T16:28:15.263" v="326" actId="6549"/>
+          <ac:spMkLst>
+            <pc:docMk/>
+            <pc:sldMk cId="1674379023" sldId="602"/>
+            <ac:spMk id="9" creationId="{1F896577-4B60-4BA6-A121-97638A434181}"/>
+          </ac:spMkLst>
+        </pc:spChg>
+      </pc:sldChg>
+      <pc:sldChg chg="modSp mod">
+        <pc:chgData name="Lizethe Pérez Fuertes" userId="4ae9ef87-2a7d-42f8-8dfa-0a501a9e2ff4" providerId="ADAL" clId="{FDDD45CB-1330-4033-A842-3D2746AFF7C7}" dt="2026-09-03T16:27:17.202" v="317" actId="6549"/>
+        <pc:sldMkLst>
+          <pc:docMk/>
+          <pc:sldMk cId="3059498909" sldId="603"/>
+        </pc:sldMkLst>
+        <pc:spChg chg="mod">
+          <ac:chgData name="Lizethe Pérez Fuertes" userId="4ae9ef87-2a7d-42f8-8dfa-0a501a9e2ff4" providerId="ADAL" clId="{FDDD45CB-1330-4033-A842-3D2746AFF7C7}" dt="2026-09-03T16:27:17.202" v="317" actId="6549"/>
+          <ac:spMkLst>
+            <pc:docMk/>
+            <pc:sldMk cId="3059498909" sldId="603"/>
+            <ac:spMk id="4" creationId="{7CE40F4F-E91D-42FD-B661-EAA8BC18ABC8}"/>
+          </ac:spMkLst>
+        </pc:spChg>
+      </pc:sldChg>
+      <pc:sldChg chg="modSp">
+        <pc:chgData name="Lizethe Pérez Fuertes" userId="4ae9ef87-2a7d-42f8-8dfa-0a501a9e2ff4" providerId="ADAL" clId="{FDDD45CB-1330-4033-A842-3D2746AFF7C7}" dt="2026-09-03T16:27:55.849" v="318"/>
+        <pc:sldMkLst>
+          <pc:docMk/>
+          <pc:sldMk cId="3978711830" sldId="605"/>
+        </pc:sldMkLst>
+        <pc:spChg chg="mod">
+          <ac:chgData name="Lizethe Pérez Fuertes" userId="4ae9ef87-2a7d-42f8-8dfa-0a501a9e2ff4" providerId="ADAL" clId="{FDDD45CB-1330-4033-A842-3D2746AFF7C7}" dt="2026-09-03T16:27:55.849" v="318"/>
+          <ac:spMkLst>
+            <pc:docMk/>
+            <pc:sldMk cId="3978711830" sldId="605"/>
+            <ac:spMk id="4" creationId="{7CE40F4F-E91D-42FD-B661-EAA8BC18ABC8}"/>
+          </ac:spMkLst>
+        </pc:spChg>
+      </pc:sldChg>
+      <pc:sldChg chg="modSp mod">
+        <pc:chgData name="Lizethe Pérez Fuertes" userId="4ae9ef87-2a7d-42f8-8dfa-0a501a9e2ff4" providerId="ADAL" clId="{FDDD45CB-1330-4033-A842-3D2746AFF7C7}" dt="2026-09-03T16:23:19.561" v="227" actId="6549"/>
+        <pc:sldMkLst>
+          <pc:docMk/>
+          <pc:sldMk cId="3312662471" sldId="646"/>
+        </pc:sldMkLst>
+        <pc:spChg chg="mod">
+          <ac:chgData name="Lizethe Pérez Fuertes" userId="4ae9ef87-2a7d-42f8-8dfa-0a501a9e2ff4" providerId="ADAL" clId="{FDDD45CB-1330-4033-A842-3D2746AFF7C7}" dt="2026-09-03T16:23:08.486" v="207" actId="6549"/>
+          <ac:spMkLst>
+            <pc:docMk/>
+            <pc:sldMk cId="3312662471" sldId="646"/>
+            <ac:spMk id="6" creationId="{08912013-0DAA-4E2F-81D3-4CE3B7140A06}"/>
+          </ac:spMkLst>
+        </pc:spChg>
+        <pc:spChg chg="mod">
+          <ac:chgData name="Lizethe Pérez Fuertes" userId="4ae9ef87-2a7d-42f8-8dfa-0a501a9e2ff4" providerId="ADAL" clId="{FDDD45CB-1330-4033-A842-3D2746AFF7C7}" dt="2026-09-03T16:23:19.561" v="227" actId="6549"/>
+          <ac:spMkLst>
+            <pc:docMk/>
+            <pc:sldMk cId="3312662471" sldId="646"/>
+            <ac:spMk id="8" creationId="{36965C09-729F-4A40-B173-C14D1DCB7A9A}"/>
+          </ac:spMkLst>
+        </pc:spChg>
+      </pc:sldChg>
+      <pc:sldChg chg="modSp mod">
+        <pc:chgData name="Lizethe Pérez Fuertes" userId="4ae9ef87-2a7d-42f8-8dfa-0a501a9e2ff4" providerId="ADAL" clId="{FDDD45CB-1330-4033-A842-3D2746AFF7C7}" dt="2026-09-03T16:27:55.849" v="318"/>
+        <pc:sldMkLst>
+          <pc:docMk/>
+          <pc:sldMk cId="2206757477" sldId="647"/>
+        </pc:sldMkLst>
+        <pc:spChg chg="mod">
+          <ac:chgData name="Lizethe Pérez Fuertes" userId="4ae9ef87-2a7d-42f8-8dfa-0a501a9e2ff4" providerId="ADAL" clId="{FDDD45CB-1330-4033-A842-3D2746AFF7C7}" dt="2026-09-03T16:27:55.849" v="318"/>
+          <ac:spMkLst>
+            <pc:docMk/>
+            <pc:sldMk cId="2206757477" sldId="647"/>
+            <ac:spMk id="4" creationId="{64E5AC4F-F553-1E7D-56B9-35DB015E2DE7}"/>
+          </ac:spMkLst>
+        </pc:spChg>
+        <pc:spChg chg="mod">
+          <ac:chgData name="Lizethe Pérez Fuertes" userId="4ae9ef87-2a7d-42f8-8dfa-0a501a9e2ff4" providerId="ADAL" clId="{FDDD45CB-1330-4033-A842-3D2746AFF7C7}" dt="2026-09-03T16:23:45.798" v="243" actId="6549"/>
+          <ac:spMkLst>
+            <pc:docMk/>
+            <pc:sldMk cId="2206757477" sldId="647"/>
+            <ac:spMk id="6" creationId="{55B72C59-3D23-DBA3-3DD7-4B14E3DFE15C}"/>
+          </ac:spMkLst>
+        </pc:spChg>
+        <pc:spChg chg="mod">
+          <ac:chgData name="Lizethe Pérez Fuertes" userId="4ae9ef87-2a7d-42f8-8dfa-0a501a9e2ff4" providerId="ADAL" clId="{FDDD45CB-1330-4033-A842-3D2746AFF7C7}" dt="2026-09-03T16:24:03.745" v="277" actId="6549"/>
+          <ac:spMkLst>
+            <pc:docMk/>
+            <pc:sldMk cId="2206757477" sldId="647"/>
+            <ac:spMk id="8" creationId="{6F59E072-939F-134B-44DE-F9F6F5A68348}"/>
+          </ac:spMkLst>
+        </pc:spChg>
+      </pc:sldChg>
+      <pc:sldChg chg="modSp mod">
+        <pc:chgData name="Lizethe Pérez Fuertes" userId="4ae9ef87-2a7d-42f8-8dfa-0a501a9e2ff4" providerId="ADAL" clId="{FDDD45CB-1330-4033-A842-3D2746AFF7C7}" dt="2026-09-03T16:26:48.813" v="287" actId="6549"/>
+        <pc:sldMkLst>
+          <pc:docMk/>
+          <pc:sldMk cId="712346558" sldId="649"/>
+        </pc:sldMkLst>
+        <pc:spChg chg="mod">
+          <ac:chgData name="Lizethe Pérez Fuertes" userId="4ae9ef87-2a7d-42f8-8dfa-0a501a9e2ff4" providerId="ADAL" clId="{FDDD45CB-1330-4033-A842-3D2746AFF7C7}" dt="2026-09-03T16:26:48.813" v="287" actId="6549"/>
+          <ac:spMkLst>
+            <pc:docMk/>
+            <pc:sldMk cId="712346558" sldId="649"/>
+            <ac:spMk id="4" creationId="{52600C6A-A4CE-782C-1E7B-1F867FBDC852}"/>
+          </ac:spMkLst>
+        </pc:spChg>
+        <pc:picChg chg="mod">
+          <ac:chgData name="Lizethe Pérez Fuertes" userId="4ae9ef87-2a7d-42f8-8dfa-0a501a9e2ff4" providerId="ADAL" clId="{FDDD45CB-1330-4033-A842-3D2746AFF7C7}" dt="2026-08-28T21:17:00.179" v="197" actId="1076"/>
+          <ac:picMkLst>
+            <pc:docMk/>
+            <pc:sldMk cId="712346558" sldId="649"/>
+            <ac:picMk id="6" creationId="{9D373540-466E-D9F9-F3FA-1460FE691F98}"/>
+          </ac:picMkLst>
+        </pc:picChg>
+      </pc:sldChg>
+      <pc:sldChg chg="modSp mod">
+        <pc:chgData name="Lizethe Pérez Fuertes" userId="4ae9ef87-2a7d-42f8-8dfa-0a501a9e2ff4" providerId="ADAL" clId="{FDDD45CB-1330-4033-A842-3D2746AFF7C7}" dt="2026-09-03T16:26:57.261" v="297" actId="6549"/>
+        <pc:sldMkLst>
+          <pc:docMk/>
+          <pc:sldMk cId="2485710823" sldId="650"/>
+        </pc:sldMkLst>
+        <pc:spChg chg="mod">
+          <ac:chgData name="Lizethe Pérez Fuertes" userId="4ae9ef87-2a7d-42f8-8dfa-0a501a9e2ff4" providerId="ADAL" clId="{FDDD45CB-1330-4033-A842-3D2746AFF7C7}" dt="2026-09-03T16:26:57.261" v="297" actId="6549"/>
+          <ac:spMkLst>
+            <pc:docMk/>
+            <pc:sldMk cId="2485710823" sldId="650"/>
+            <ac:spMk id="4" creationId="{DBE63BE9-3012-EA71-30D0-9910634A8C1E}"/>
           </ac:spMkLst>
         </pc:spChg>
       </pc:sldChg>
@@ -256,7 +416,7 @@
           <a:p>
             <a:fld id="{DDE721D5-655F-45D2-B717-3C4CD78C8568}" type="datetimeFigureOut">
               <a:rPr lang="es-MX" smtClean="0"/>
-              <a:t>11/08/2026</a:t>
+              <a:t>03/09/2026</a:t>
             </a:fld>
             <a:endParaRPr lang="es-MX" dirty="0"/>
           </a:p>
@@ -705,7 +865,7 @@
           <a:p>
             <a:fld id="{B3F3E716-CACC-4490-AD07-F24B6A68DE47}" type="datetimeFigureOut">
               <a:rPr lang="es-MX" smtClean="0"/>
-              <a:t>11/08/2026</a:t>
+              <a:t>03/09/2026</a:t>
             </a:fld>
             <a:endParaRPr lang="es-MX" dirty="0"/>
           </a:p>
@@ -875,7 +1035,7 @@
           <a:p>
             <a:fld id="{B3F3E716-CACC-4490-AD07-F24B6A68DE47}" type="datetimeFigureOut">
               <a:rPr lang="es-MX" smtClean="0"/>
-              <a:t>11/08/2026</a:t>
+              <a:t>03/09/2026</a:t>
             </a:fld>
             <a:endParaRPr lang="es-MX" dirty="0"/>
           </a:p>
@@ -1055,7 +1215,7 @@
           <a:p>
             <a:fld id="{B3F3E716-CACC-4490-AD07-F24B6A68DE47}" type="datetimeFigureOut">
               <a:rPr lang="es-MX" smtClean="0"/>
-              <a:t>11/08/2026</a:t>
+              <a:t>03/09/2026</a:t>
             </a:fld>
             <a:endParaRPr lang="es-MX" dirty="0"/>
           </a:p>
@@ -1208,7 +1368,7 @@
           <a:p>
             <a:fld id="{1D8BD707-D9CF-40AE-B4C6-C98DA3205C09}" type="datetimeFigureOut">
               <a:rPr lang="en-US" smtClean="0"/>
-              <a:t>8/11/2026</a:t>
+              <a:t>9/3/2026</a:t>
             </a:fld>
             <a:endParaRPr lang="en-US" dirty="0"/>
           </a:p>
@@ -1665,7 +1825,7 @@
           <a:p>
             <a:fld id="{B3F3E716-CACC-4490-AD07-F24B6A68DE47}" type="datetimeFigureOut">
               <a:rPr lang="es-MX" smtClean="0"/>
-              <a:t>11/08/2026</a:t>
+              <a:t>03/09/2026</a:t>
             </a:fld>
             <a:endParaRPr lang="es-MX" dirty="0"/>
           </a:p>
@@ -1911,7 +2071,7 @@
           <a:p>
             <a:fld id="{B3F3E716-CACC-4490-AD07-F24B6A68DE47}" type="datetimeFigureOut">
               <a:rPr lang="es-MX" smtClean="0"/>
-              <a:t>11/08/2026</a:t>
+              <a:t>03/09/2026</a:t>
             </a:fld>
             <a:endParaRPr lang="es-MX" dirty="0"/>
           </a:p>
@@ -2199,7 +2359,7 @@
           <a:p>
             <a:fld id="{B3F3E716-CACC-4490-AD07-F24B6A68DE47}" type="datetimeFigureOut">
               <a:rPr lang="es-MX" smtClean="0"/>
-              <a:t>11/08/2026</a:t>
+              <a:t>03/09/2026</a:t>
             </a:fld>
             <a:endParaRPr lang="es-MX" dirty="0"/>
           </a:p>
@@ -2621,7 +2781,7 @@
           <a:p>
             <a:fld id="{B3F3E716-CACC-4490-AD07-F24B6A68DE47}" type="datetimeFigureOut">
               <a:rPr lang="es-MX" smtClean="0"/>
-              <a:t>11/08/2026</a:t>
+              <a:t>03/09/2026</a:t>
             </a:fld>
             <a:endParaRPr lang="es-MX" dirty="0"/>
           </a:p>
@@ -2739,7 +2899,7 @@
           <a:p>
             <a:fld id="{B3F3E716-CACC-4490-AD07-F24B6A68DE47}" type="datetimeFigureOut">
               <a:rPr lang="es-MX" smtClean="0"/>
-              <a:t>11/08/2026</a:t>
+              <a:t>03/09/2026</a:t>
             </a:fld>
             <a:endParaRPr lang="es-MX" dirty="0"/>
           </a:p>
@@ -2834,7 +2994,7 @@
           <a:p>
             <a:fld id="{B3F3E716-CACC-4490-AD07-F24B6A68DE47}" type="datetimeFigureOut">
               <a:rPr lang="es-MX" smtClean="0"/>
-              <a:t>11/08/2026</a:t>
+              <a:t>03/09/2026</a:t>
             </a:fld>
             <a:endParaRPr lang="es-MX" dirty="0"/>
           </a:p>
@@ -3111,7 +3271,7 @@
           <a:p>
             <a:fld id="{B3F3E716-CACC-4490-AD07-F24B6A68DE47}" type="datetimeFigureOut">
               <a:rPr lang="es-MX" smtClean="0"/>
-              <a:t>11/08/2026</a:t>
+              <a:t>03/09/2026</a:t>
             </a:fld>
             <a:endParaRPr lang="es-MX" dirty="0"/>
           </a:p>
@@ -3364,7 +3524,7 @@
           <a:p>
             <a:fld id="{B3F3E716-CACC-4490-AD07-F24B6A68DE47}" type="datetimeFigureOut">
               <a:rPr lang="es-MX" smtClean="0"/>
-              <a:t>11/08/2026</a:t>
+              <a:t>03/09/2026</a:t>
             </a:fld>
             <a:endParaRPr lang="es-MX" dirty="0"/>
           </a:p>
@@ -3577,7 +3737,7 @@
           <a:p>
             <a:fld id="{B3F3E716-CACC-4490-AD07-F24B6A68DE47}" type="datetimeFigureOut">
               <a:rPr lang="es-MX" smtClean="0"/>
-              <a:t>11/08/2026</a:t>
+              <a:t>03/09/2026</a:t>
             </a:fld>
             <a:endParaRPr lang="es-MX" dirty="0"/>
           </a:p>
@@ -4188,7 +4348,7 @@
                 </a:effectLst>
                 <a:latin typeface="Dom Casual" charset="0"/>
               </a:rPr>
-              <a:t>Encapsulación : atributos privados</a:t>
+              <a:t>Encapsulamiento : atributos privados</a:t>
             </a:r>
           </a:p>
         </p:txBody>
@@ -7979,7 +8139,7 @@
                 </a:effectLst>
                 <a:latin typeface="Dom Casual" charset="0"/>
               </a:rPr>
-              <a:t>Encapsulación</a:t>
+              <a:t>Encapsulamiento</a:t>
             </a:r>
           </a:p>
         </p:txBody>
@@ -8177,7 +8337,7 @@
                 </a:solidFill>
                 <a:latin typeface="Dom Casual" charset="0"/>
               </a:rPr>
-              <a:t>encapsulación</a:t>
+              <a:t>encapsulamiento</a:t>
             </a:r>
             <a:r>
               <a:rPr lang="es-ES" altLang="es-MX" sz="1600" dirty="0">
@@ -8264,7 +8424,7 @@
                 </a:solidFill>
                 <a:latin typeface="Dom Casual" charset="0"/>
               </a:rPr>
-              <a:t>encapsulación</a:t>
+              <a:t>encapsulamiento</a:t>
             </a:r>
             <a:r>
               <a:rPr lang="es-MX" altLang="es-MX" sz="1600" dirty="0">
@@ -8452,7 +8612,7 @@
                 </a:effectLst>
                 <a:latin typeface="Dom Casual" charset="0"/>
               </a:rPr>
-              <a:t>Importancia de la encapsulación</a:t>
+              <a:t>Importancia del encapsulamiento</a:t>
             </a:r>
           </a:p>
         </p:txBody>
@@ -8639,7 +8799,7 @@
                 </a:solidFill>
                 <a:latin typeface="Dom Casual" charset="0"/>
               </a:rPr>
-              <a:t>La encapsulación es importante en la POO porque </a:t>
+              <a:t>El encapsulamiento es importante en la POO porque </a:t>
             </a:r>
             <a:r>
               <a:rPr lang="es-MX" sz="1600" b="1" dirty="0">
@@ -8841,7 +9001,7 @@
                 </a:solidFill>
                 <a:latin typeface="Dom Casual" charset="0"/>
               </a:rPr>
-              <a:t>Piensa en la interfaz de un coche. Para conducir un coche, no necesitas saber cómo funciona exactamente el motor o la transmisión. Solo necesitas interactuar con los controles (volante, pedales) que están expuestos en su interfaz. La encapsulación funciona de manera similar, ocultando los complejos detalles internos del objeto y proporcionando una interfaz simple y controlada para interactuar con él. </a:t>
+              <a:t>Piensa en la interfaz de un coche. Para conducir un coche, no necesitas saber cómo funciona exactamente el motor o la transmisión. Solo necesitas interactuar con los controles (volante, pedales) que están expuestos en su interfaz. La Encapsulamiento funciona de manera similar, ocultando los complejos detalles internos del objeto y proporcionando una interfaz simple y controlada para interactuar con él. </a:t>
             </a:r>
           </a:p>
         </p:txBody>
@@ -9282,7 +9442,7 @@
                 </a:effectLst>
                 <a:latin typeface="Dom Casual" charset="0"/>
               </a:rPr>
-              <a:t>Encapsulación : atributos privados</a:t>
+              <a:t>Encapsulamiento : atributos privados</a:t>
             </a:r>
           </a:p>
         </p:txBody>
@@ -9423,7 +9583,7 @@
         </p:blipFill>
         <p:spPr>
           <a:xfrm>
-            <a:off x="2699792" y="3038114"/>
+            <a:off x="2699792" y="2996952"/>
             <a:ext cx="3963109" cy="3059025"/>
           </a:xfrm>
           <a:prstGeom prst="rect">
@@ -9525,7 +9685,7 @@
                 </a:effectLst>
                 <a:latin typeface="Dom Casual" charset="0"/>
               </a:rPr>
-              <a:t>Encapsulación : atributos privados</a:t>
+              <a:t>Encapsulamiento : atributos privados</a:t>
             </a:r>
           </a:p>
         </p:txBody>
@@ -9931,7 +10091,7 @@
                 </a:effectLst>
                 <a:latin typeface="Dom Casual" charset="0"/>
               </a:rPr>
-              <a:t>Encapsulación : atributos privados</a:t>
+              <a:t>Encapsulamiento : atributos privados</a:t>
             </a:r>
           </a:p>
         </p:txBody>
@@ -9977,7 +10137,7 @@
                   </a:schemeClr>
                 </a:solidFill>
               </a:rPr>
-              <a:t>La encapsulación hace referencia a la capacidad que tiene un objeto de ocultar su estado, de manera que sus datos solo se puedan modificar por medio de las operaciones (métodos) que ofrece. </a:t>
+              <a:t>El encapsulamiento hace referencia a la capacidad que tiene un objeto de ocultar su estado, de manera que sus datos solo se puedan modificar por medio de las operaciones (métodos) que ofrece. </a:t>
             </a:r>
             <a:endParaRPr lang="es-ES" sz="1600" dirty="0">
               <a:solidFill>
@@ -10262,7 +10422,7 @@
                 </a:effectLst>
                 <a:latin typeface="Dom Casual" charset="0"/>
               </a:rPr>
-              <a:t>Encapsulación : atributos privados</a:t>
+              <a:t>Encapsulamiento : atributos privados</a:t>
             </a:r>
           </a:p>
         </p:txBody>
@@ -10729,7 +10889,7 @@
                 </a:effectLst>
                 <a:latin typeface="Dom Casual" charset="0"/>
               </a:rPr>
-              <a:t>Encapsulación : atributos privados</a:t>
+              <a:t>Encapsulamiento : atributos privados</a:t>
             </a:r>
           </a:p>
         </p:txBody>
